--- a/assets/TCS302/Unit-2/Lecture11-12_Queue_ADT_Array_Representation.pptx
+++ b/assets/TCS302/Unit-2/Lecture11-12_Queue_ADT_Array_Representation.pptx
@@ -3864,90 +3864,6 @@
           </a:p>
         </p:txBody>
       </p:sp>
-      <p:sp>
-        <p:nvSpPr>
-          <p:cNvPr id="11" name="Shape 9"/>
-          <p:cNvSpPr/>
-          <p:nvPr/>
-        </p:nvSpPr>
-        <p:spPr>
-          <a:xfrm>
-            <a:off x="457200" y="4526280"/>
-            <a:ext cx="8229600" cy="457200"/>
-          </a:xfrm>
-          <a:prstGeom prst="roundRect">
-            <a:avLst>
-              <a:gd name="adj" fmla="val 14000"/>
-            </a:avLst>
-          </a:prstGeom>
-          <a:solidFill>
-            <a:srgbClr val="EEF3FB"/>
-          </a:solidFill>
-          <a:ln w="12700">
-            <a:solidFill>
-              <a:srgbClr val="1E2761"/>
-            </a:solidFill>
-            <a:prstDash val="solid"/>
-          </a:ln>
-        </p:spPr>
-        <p:txBody>
-          <a:bodyPr/>
-          <a:lstStyle/>
-          <a:p>
-            <a:endParaRPr lang="en-IN"/>
-          </a:p>
-        </p:txBody>
-      </p:sp>
-      <p:sp>
-        <p:nvSpPr>
-          <p:cNvPr id="12" name="Text 10"/>
-          <p:cNvSpPr/>
-          <p:nvPr/>
-        </p:nvSpPr>
-        <p:spPr>
-          <a:xfrm>
-            <a:off x="640080" y="4526280"/>
-            <a:ext cx="7863840" cy="457200"/>
-          </a:xfrm>
-          <a:prstGeom prst="rect">
-            <a:avLst/>
-          </a:prstGeom>
-          <a:noFill/>
-          <a:ln/>
-        </p:spPr>
-        <p:txBody>
-          <a:bodyPr wrap="square" lIns="0" tIns="0" rIns="0" bIns="0" rtlCol="0" anchor="ctr"/>
-          <a:lstStyle/>
-          <a:p>
-            <a:pPr marL="0" indent="0">
-              <a:buNone/>
-            </a:pPr>
-            <a:r>
-              <a:rPr lang="en-US" sz="1200" b="1" dirty="0">
-                <a:solidFill>
-                  <a:srgbClr val="1E2761"/>
-                </a:solidFill>
-                <a:latin typeface="Calibri" pitchFamily="34" charset="0"/>
-                <a:ea typeface="Calibri" pitchFamily="34" charset="-122"/>
-                <a:cs typeface="Calibri" pitchFamily="34" charset="-120"/>
-              </a:rPr>
-              <a:t>ASK   </a:t>
-            </a:r>
-            <a:r>
-              <a:rPr lang="en-US" sz="1250" i="1" dirty="0">
-                <a:solidFill>
-                  <a:srgbClr val="2B2B2B"/>
-                </a:solidFill>
-                <a:latin typeface="Calibri" pitchFamily="34" charset="0"/>
-                <a:ea typeface="Calibri" pitchFamily="34" charset="-122"/>
-                <a:cs typeface="Calibri" pitchFamily="34" charset="-120"/>
-              </a:rPr>
-              <a:t>The stack's peek showed the NEWEST element; the queue's shows the OLDEST. Why is each the right choice?</a:t>
-            </a:r>
-            <a:endParaRPr lang="en-US" sz="1200" dirty="0"/>
-          </a:p>
-        </p:txBody>
-      </p:sp>
     </p:spTree>
   </p:cSld>
   <p:clrMapOvr>
@@ -4145,7 +4061,7 @@
         </p:nvGraphicFramePr>
         <p:xfrm>
           <a:off x="457200" y="1234440"/>
-          <a:ext cx="8229600" cy="914400"/>
+          <a:ext cx="8229600" cy="2852928"/>
         </p:xfrm>
         <a:graphic>
           <a:graphicData uri="http://schemas.openxmlformats.org/drawingml/2006/table">
@@ -5920,90 +5836,6 @@
           </a:p>
         </p:txBody>
       </p:sp>
-      <p:sp>
-        <p:nvSpPr>
-          <p:cNvPr id="14" name="Shape 12"/>
-          <p:cNvSpPr/>
-          <p:nvPr/>
-        </p:nvSpPr>
-        <p:spPr>
-          <a:xfrm>
-            <a:off x="457200" y="4297680"/>
-            <a:ext cx="8229600" cy="502920"/>
-          </a:xfrm>
-          <a:prstGeom prst="roundRect">
-            <a:avLst>
-              <a:gd name="adj" fmla="val 12727"/>
-            </a:avLst>
-          </a:prstGeom>
-          <a:solidFill>
-            <a:srgbClr val="EEF3FB"/>
-          </a:solidFill>
-          <a:ln w="12700">
-            <a:solidFill>
-              <a:srgbClr val="1E2761"/>
-            </a:solidFill>
-            <a:prstDash val="solid"/>
-          </a:ln>
-        </p:spPr>
-        <p:txBody>
-          <a:bodyPr/>
-          <a:lstStyle/>
-          <a:p>
-            <a:endParaRPr lang="en-IN"/>
-          </a:p>
-        </p:txBody>
-      </p:sp>
-      <p:sp>
-        <p:nvSpPr>
-          <p:cNvPr id="15" name="Text 13"/>
-          <p:cNvSpPr/>
-          <p:nvPr/>
-        </p:nvSpPr>
-        <p:spPr>
-          <a:xfrm>
-            <a:off x="640080" y="4297680"/>
-            <a:ext cx="7863840" cy="502920"/>
-          </a:xfrm>
-          <a:prstGeom prst="rect">
-            <a:avLst/>
-          </a:prstGeom>
-          <a:noFill/>
-          <a:ln/>
-        </p:spPr>
-        <p:txBody>
-          <a:bodyPr wrap="square" lIns="0" tIns="0" rIns="0" bIns="0" rtlCol="0" anchor="ctr"/>
-          <a:lstStyle/>
-          <a:p>
-            <a:pPr marL="0" indent="0">
-              <a:buNone/>
-            </a:pPr>
-            <a:r>
-              <a:rPr lang="en-US" sz="1200" b="1" dirty="0">
-                <a:solidFill>
-                  <a:srgbClr val="1E2761"/>
-                </a:solidFill>
-                <a:latin typeface="Calibri" pitchFamily="34" charset="0"/>
-                <a:ea typeface="Calibri" pitchFamily="34" charset="-122"/>
-                <a:cs typeface="Calibri" pitchFamily="34" charset="-120"/>
-              </a:rPr>
-              <a:t>ASK   </a:t>
-            </a:r>
-            <a:r>
-              <a:rPr lang="en-US" sz="1250" i="1" dirty="0">
-                <a:solidFill>
-                  <a:srgbClr val="2B2B2B"/>
-                </a:solidFill>
-                <a:latin typeface="Calibri" pitchFamily="34" charset="0"/>
-                <a:ea typeface="Calibri" pitchFamily="34" charset="-122"/>
-                <a:cs typeface="Calibri" pitchFamily="34" charset="-120"/>
-              </a:rPr>
-              <a:t>Your music app has a "play next" list and an "up next" list. Which is a stack, which is a queue?</a:t>
-            </a:r>
-            <a:endParaRPr lang="en-US" sz="1200" dirty="0"/>
-          </a:p>
-        </p:txBody>
-      </p:sp>
     </p:spTree>
   </p:cSld>
   <p:clrMapOvr>
@@ -6305,45 +6137,6 @@
           </a:p>
         </p:txBody>
       </p:sp>
-      <p:sp>
-        <p:nvSpPr>
-          <p:cNvPr id="7" name="Text 5"/>
-          <p:cNvSpPr/>
-          <p:nvPr/>
-        </p:nvSpPr>
-        <p:spPr>
-          <a:xfrm>
-            <a:off x="640080" y="4800600"/>
-            <a:ext cx="7863840" cy="274320"/>
-          </a:xfrm>
-          <a:prstGeom prst="rect">
-            <a:avLst/>
-          </a:prstGeom>
-          <a:noFill/>
-          <a:ln/>
-        </p:spPr>
-        <p:txBody>
-          <a:bodyPr wrap="square" lIns="0" tIns="0" rIns="0" bIns="0" rtlCol="0" anchor="ctr"/>
-          <a:lstStyle/>
-          <a:p>
-            <a:pPr marL="0" indent="0">
-              <a:buNone/>
-            </a:pPr>
-            <a:r>
-              <a:rPr lang="en-US" sz="1100" i="1" dirty="0">
-                <a:solidFill>
-                  <a:srgbClr val="CADCFC"/>
-                </a:solidFill>
-                <a:latin typeface="Calibri" pitchFamily="34" charset="0"/>
-                <a:ea typeface="Calibri" pitchFamily="34" charset="-122"/>
-                <a:cs typeface="Calibri" pitchFamily="34" charset="-120"/>
-              </a:rPr>
-              <a:t>Next lecture: queue operations completed • then the circular queue fixes false overflow</a:t>
-            </a:r>
-            <a:endParaRPr lang="en-US" sz="1100" dirty="0"/>
-          </a:p>
-        </p:txBody>
-      </p:sp>
     </p:spTree>
   </p:cSld>
   <p:clrMapOvr>
@@ -6814,90 +6607,6 @@
           </a:p>
         </p:txBody>
       </p:sp>
-      <p:sp>
-        <p:nvSpPr>
-          <p:cNvPr id="11" name="Shape 9"/>
-          <p:cNvSpPr/>
-          <p:nvPr/>
-        </p:nvSpPr>
-        <p:spPr>
-          <a:xfrm>
-            <a:off x="457200" y="4160520"/>
-            <a:ext cx="8229600" cy="502920"/>
-          </a:xfrm>
-          <a:prstGeom prst="roundRect">
-            <a:avLst>
-              <a:gd name="adj" fmla="val 12727"/>
-            </a:avLst>
-          </a:prstGeom>
-          <a:solidFill>
-            <a:srgbClr val="EEF3FB"/>
-          </a:solidFill>
-          <a:ln w="12700">
-            <a:solidFill>
-              <a:srgbClr val="1E2761"/>
-            </a:solidFill>
-            <a:prstDash val="solid"/>
-          </a:ln>
-        </p:spPr>
-        <p:txBody>
-          <a:bodyPr/>
-          <a:lstStyle/>
-          <a:p>
-            <a:endParaRPr lang="en-IN"/>
-          </a:p>
-        </p:txBody>
-      </p:sp>
-      <p:sp>
-        <p:nvSpPr>
-          <p:cNvPr id="12" name="Text 10"/>
-          <p:cNvSpPr/>
-          <p:nvPr/>
-        </p:nvSpPr>
-        <p:spPr>
-          <a:xfrm>
-            <a:off x="640080" y="4160520"/>
-            <a:ext cx="7863840" cy="502920"/>
-          </a:xfrm>
-          <a:prstGeom prst="rect">
-            <a:avLst/>
-          </a:prstGeom>
-          <a:noFill/>
-          <a:ln/>
-        </p:spPr>
-        <p:txBody>
-          <a:bodyPr wrap="square" lIns="0" tIns="0" rIns="0" bIns="0" rtlCol="0" anchor="ctr"/>
-          <a:lstStyle/>
-          <a:p>
-            <a:pPr marL="0" indent="0">
-              <a:buNone/>
-            </a:pPr>
-            <a:r>
-              <a:rPr lang="en-US" sz="1200" b="1" dirty="0">
-                <a:solidFill>
-                  <a:srgbClr val="1E2761"/>
-                </a:solidFill>
-                <a:latin typeface="Calibri" pitchFamily="34" charset="0"/>
-                <a:ea typeface="Calibri" pitchFamily="34" charset="-122"/>
-                <a:cs typeface="Calibri" pitchFamily="34" charset="-120"/>
-              </a:rPr>
-              <a:t>ASK   </a:t>
-            </a:r>
-            <a:r>
-              <a:rPr lang="en-US" sz="1250" i="1" dirty="0">
-                <a:solidFill>
-                  <a:srgbClr val="2B2B2B"/>
-                </a:solidFill>
-                <a:latin typeface="Calibri" pitchFamily="34" charset="0"/>
-                <a:ea typeface="Calibri" pitchFamily="34" charset="-122"/>
-                <a:cs typeface="Calibri" pitchFamily="34" charset="-120"/>
-              </a:rPr>
-              <a:t>Ten people join a line and the same ten leave. In what order do they leave a stack? A queue?</a:t>
-            </a:r>
-            <a:endParaRPr lang="en-US" sz="1200" dirty="0"/>
-          </a:p>
-        </p:txBody>
-      </p:sp>
     </p:spTree>
   </p:cSld>
   <p:clrMapOvr>
@@ -7740,90 +7449,6 @@
               <a:t>Definition to note: a queue is a linear list in which insertions are made at one end (rear) and deletions at the other end (front) — First In, First Out (FIFO).</a:t>
             </a:r>
             <a:endParaRPr lang="en-US" sz="1250" dirty="0"/>
-          </a:p>
-        </p:txBody>
-      </p:sp>
-      <p:sp>
-        <p:nvSpPr>
-          <p:cNvPr id="22" name="Shape 20"/>
-          <p:cNvSpPr/>
-          <p:nvPr/>
-        </p:nvSpPr>
-        <p:spPr>
-          <a:xfrm>
-            <a:off x="457200" y="4160520"/>
-            <a:ext cx="8229600" cy="502920"/>
-          </a:xfrm>
-          <a:prstGeom prst="roundRect">
-            <a:avLst>
-              <a:gd name="adj" fmla="val 12727"/>
-            </a:avLst>
-          </a:prstGeom>
-          <a:solidFill>
-            <a:srgbClr val="EEF3FB"/>
-          </a:solidFill>
-          <a:ln w="12700">
-            <a:solidFill>
-              <a:srgbClr val="1E2761"/>
-            </a:solidFill>
-            <a:prstDash val="solid"/>
-          </a:ln>
-        </p:spPr>
-        <p:txBody>
-          <a:bodyPr/>
-          <a:lstStyle/>
-          <a:p>
-            <a:endParaRPr lang="en-IN"/>
-          </a:p>
-        </p:txBody>
-      </p:sp>
-      <p:sp>
-        <p:nvSpPr>
-          <p:cNvPr id="23" name="Text 21"/>
-          <p:cNvSpPr/>
-          <p:nvPr/>
-        </p:nvSpPr>
-        <p:spPr>
-          <a:xfrm>
-            <a:off x="640080" y="4160520"/>
-            <a:ext cx="7863840" cy="502920"/>
-          </a:xfrm>
-          <a:prstGeom prst="rect">
-            <a:avLst/>
-          </a:prstGeom>
-          <a:noFill/>
-          <a:ln/>
-        </p:spPr>
-        <p:txBody>
-          <a:bodyPr wrap="square" lIns="0" tIns="0" rIns="0" bIns="0" rtlCol="0" anchor="ctr"/>
-          <a:lstStyle/>
-          <a:p>
-            <a:pPr marL="0" indent="0">
-              <a:buNone/>
-            </a:pPr>
-            <a:r>
-              <a:rPr lang="en-US" sz="1200" b="1" dirty="0">
-                <a:solidFill>
-                  <a:srgbClr val="1E2761"/>
-                </a:solidFill>
-                <a:latin typeface="Calibri" pitchFamily="34" charset="0"/>
-                <a:ea typeface="Calibri" pitchFamily="34" charset="-122"/>
-                <a:cs typeface="Calibri" pitchFamily="34" charset="-120"/>
-              </a:rPr>
-              <a:t>ASK   </a:t>
-            </a:r>
-            <a:r>
-              <a:rPr lang="en-US" sz="1250" i="1" dirty="0">
-                <a:solidFill>
-                  <a:srgbClr val="2B2B2B"/>
-                </a:solidFill>
-                <a:latin typeface="Calibri" pitchFamily="34" charset="0"/>
-                <a:ea typeface="Calibri" pitchFamily="34" charset="-122"/>
-                <a:cs typeface="Calibri" pitchFamily="34" charset="-120"/>
-              </a:rPr>
-              <a:t>Why would a printer using a STACK for jobs make everyone angry?</a:t>
-            </a:r>
-            <a:endParaRPr lang="en-US" sz="1200" dirty="0"/>
           </a:p>
         </p:txBody>
       </p:sp>
@@ -11270,90 +10895,6 @@
           </a:p>
         </p:txBody>
       </p:sp>
-      <p:sp>
-        <p:nvSpPr>
-          <p:cNvPr id="9" name="Shape 7"/>
-          <p:cNvSpPr/>
-          <p:nvPr/>
-        </p:nvSpPr>
-        <p:spPr>
-          <a:xfrm>
-            <a:off x="5486400" y="3886200"/>
-            <a:ext cx="3200400" cy="822960"/>
-          </a:xfrm>
-          <a:prstGeom prst="roundRect">
-            <a:avLst>
-              <a:gd name="adj" fmla="val 7778"/>
-            </a:avLst>
-          </a:prstGeom>
-          <a:solidFill>
-            <a:srgbClr val="EEF3FB"/>
-          </a:solidFill>
-          <a:ln w="12700">
-            <a:solidFill>
-              <a:srgbClr val="1E2761"/>
-            </a:solidFill>
-            <a:prstDash val="solid"/>
-          </a:ln>
-        </p:spPr>
-        <p:txBody>
-          <a:bodyPr/>
-          <a:lstStyle/>
-          <a:p>
-            <a:endParaRPr lang="en-IN"/>
-          </a:p>
-        </p:txBody>
-      </p:sp>
-      <p:sp>
-        <p:nvSpPr>
-          <p:cNvPr id="10" name="Text 8"/>
-          <p:cNvSpPr/>
-          <p:nvPr/>
-        </p:nvSpPr>
-        <p:spPr>
-          <a:xfrm>
-            <a:off x="5669280" y="3886200"/>
-            <a:ext cx="2834640" cy="822960"/>
-          </a:xfrm>
-          <a:prstGeom prst="rect">
-            <a:avLst/>
-          </a:prstGeom>
-          <a:noFill/>
-          <a:ln/>
-        </p:spPr>
-        <p:txBody>
-          <a:bodyPr wrap="square" lIns="0" tIns="0" rIns="0" bIns="0" rtlCol="0" anchor="ctr"/>
-          <a:lstStyle/>
-          <a:p>
-            <a:pPr marL="0" indent="0">
-              <a:buNone/>
-            </a:pPr>
-            <a:r>
-              <a:rPr lang="en-US" sz="1200" b="1" dirty="0">
-                <a:solidFill>
-                  <a:srgbClr val="1E2761"/>
-                </a:solidFill>
-                <a:latin typeface="Calibri" pitchFamily="34" charset="0"/>
-                <a:ea typeface="Calibri" pitchFamily="34" charset="-122"/>
-                <a:cs typeface="Calibri" pitchFamily="34" charset="-120"/>
-              </a:rPr>
-              <a:t>ASK   </a:t>
-            </a:r>
-            <a:r>
-              <a:rPr lang="en-US" sz="1250" i="1" dirty="0">
-                <a:solidFill>
-                  <a:srgbClr val="2B2B2B"/>
-                </a:solidFill>
-                <a:latin typeface="Calibri" pitchFamily="34" charset="0"/>
-                <a:ea typeface="Calibri" pitchFamily="34" charset="-122"/>
-                <a:cs typeface="Calibri" pitchFamily="34" charset="-120"/>
-              </a:rPr>
-              <a:t>Delete the front == -1 line and enqueue 10. What does dequeue return, and why?</a:t>
-            </a:r>
-            <a:endParaRPr lang="en-US" sz="1200" dirty="0"/>
-          </a:p>
-        </p:txBody>
-      </p:sp>
     </p:spTree>
   </p:cSld>
   <p:clrMapOvr>
@@ -12240,7 +11781,7 @@
         </p:nvGraphicFramePr>
         <p:xfrm>
           <a:off x="457200" y="1188720"/>
-          <a:ext cx="8229600" cy="914400"/>
+          <a:ext cx="8229600" cy="3291840"/>
         </p:xfrm>
         <a:graphic>
           <a:graphicData uri="http://schemas.openxmlformats.org/drawingml/2006/table">
